--- a/docs/DaoTao/Buoi04_DocSuaSource.pptx
+++ b/docs/DaoTao/Buoi04_DocSuaSource.pptx
@@ -515,7 +515,7 @@
           </a:p>
           <a:p>
             <a:r>
-              <a:t>Chuẩn bị: Dự án thử có Source Path; đã khai đường dẫn BcodeViewer.</a:t>
+              <a:t>Chuẩn bị: Dự án thử đã khai Source Path; đã khai đường dẫn tới BcodeViewer.</a:t>
             </a:r>
           </a:p>
           <a:p>
@@ -605,7 +605,7 @@
           </a:p>
           <a:p>
             <a:r>
-              <a:t>- Sửa file bằng BcodeViewer, kiểm lỗi Problems, xem trước form, chạy SQL trong file</a:t>
+              <a:t>- Sửa file bằng BcodeViewer, xem lỗi ở Problems, xem trước form, chạy SQL trong file</a:t>
             </a:r>
           </a:p>
           <a:p>
@@ -625,7 +625,7 @@
           </a:p>
           <a:p>
             <a:r>
-              <a:t>2. File Lookup: cây file theo menu, file đỏ, SearchBox, File Reference (40')</a:t>
+              <a:t>2. File Lookup: cây file theo menu, file tô đỏ, SearchBox, File Reference (40')</a:t>
             </a:r>
           </a:p>
           <a:p>
@@ -710,7 +710,12 @@
           <a:lstStyle/>
           <a:p>
             <a:r>
-              <a:t>Mọi yêu cầu sửa màn hình đều đi 5 bước. Buổi này học bước 1–3: tìm đúng file / bảng / procedure bằng WCommand và File Lookup, sửa bằng BcodeViewer, thử bằng Ctrl+F5 / Ctrl+4 trên cây WCommand hoặc F5 trong BcodeViewer. Bước 4–5 (đóng gói, triển khai) học ở buổi 10.</a:t>
+              <a:t>Mọi yêu cầu sửa màn hình đều đi qua 5 bước. Buổi này học bước 1 đến 3: tìm đúng file, bảng, procedure bằng WCommand và File Lookup; sửa bằng BcodeViewer (và SQL Query); thử bằng Ctrl+F5 / Ctrl+4 trên cây WCommand hoặc F5 trong BcodeViewer. Bước 4 và 5 (đóng gói, triển khai) học ở buổi 10.</a:t>
+            </a:r>
+          </a:p>
+          <a:p>
+            <a:r>
+              <a:t>Trước khi sửa phải biết chắc file nào đang thực sự chạy (.f hay .xml) và giữ lại bản cũ — BcodeViewer tự ghi lịch sử mỗi lần lưu.</a:t>
             </a:r>
           </a:p>
         </p:txBody>
@@ -780,27 +785,27 @@
           <a:lstStyle/>
           <a:p>
             <a:r>
-              <a:t>Cây WCommand (Ctrl+Shift+W) đọc wcommand + command. Gõ lọc theo tên / ID / link; ô (C) chỉ hiện menu customize.</a:t>
-            </a:r>
-          </a:p>
-          <a:p>
-            <a:r>
-              <a:t>Double-click menu → tab File Lookup với toàn bộ file của menu: trang Main, Dir, Grid, Filter, Lookup, Report, include, mẫu rpt/xlsx. F4 mở thêm một File Lookup để so sánh.</a:t>
-            </a:r>
-          </a:p>
-          <a:p>
-            <a:r>
-              <a:t>Trong File Lookup: gõ đúng tên trang aspx vào ô Search ra toàn bộ file của menu dùng trang đó. File tô đỏ là thiếu entity / include. Chọn file để xem trước; Edit in BcodeViewer để sửa.</a:t>
-            </a:r>
-          </a:p>
-          <a:p>
-            <a:r>
-              <a:t>Cấp source: chọn file .f → bấm nhãn Source &lt;phiên bản&gt; để xem bản chuẩn trong kho, Cấp source để chép bản chuẩn vào dự án.</a:t>
-            </a:r>
-          </a:p>
-          <a:p>
-            <a:r>
-              <a:t>Trên cây WCommand còn có: Ctrl+F5 chạy menu, Ctrl+4 chạy trong FSG FBO, Insert / F3 / F8 thêm sửa xoá menu, F12 Gen Script Menu.</a:t>
+              <a:t>Cây WCommand (Ctrl+Shift+W) đọc dữ liệu từ hai bảng wcommand và command. Gõ để lọc theo tên, ID hoặc link; ô (C) dùng để chỉ hiện các menu customize.</a:t>
+            </a:r>
+          </a:p>
+          <a:p>
+            <a:r>
+              <a:t>Double-click một menu → mở tab File Lookup liệt kê toàn bộ file của menu đó: trang Main, Dir, Grid, Filter, Lookup, Report, file include, mẫu rpt/xlsx. Bấm F4 để mở thêm một File Lookup nữa, tiện so sánh.</a:t>
+            </a:r>
+          </a:p>
+          <a:p>
+            <a:r>
+              <a:t>Trong File Lookup: gõ đúng tên trang aspx vào ô Search sẽ ra toàn bộ file của menu dùng trang đó. File bị tô đỏ là thiếu entity hoặc file include. Chọn một file để xem trước nội dung; bấm Edit in BcodeViewer để sửa.</a:t>
+            </a:r>
+          </a:p>
+          <a:p>
+            <a:r>
+              <a:t>Cấp source: chọn file .f → bấm nhãn Source &lt;phiên bản&gt; để xem bản chuẩn trong kho source, bấm Cấp source để chép bản chuẩn đó vào dự án.</a:t>
+            </a:r>
+          </a:p>
+          <a:p>
+            <a:r>
+              <a:t>Trên cây WCommand còn có: Ctrl+F5 chạy menu, Ctrl+4 chạy menu trong FSG FBO, Insert / F3 / F8 để thêm / sửa / xoá menu, F12 Gen Script Menu.</a:t>
             </a:r>
           </a:p>
         </p:txBody>
@@ -870,22 +875,22 @@
           <a:lstStyle/>
           <a:p>
             <a:r>
-              <a:t>Đầu mỗi controller là khối DOCTYPE khai báo entity.</a:t>
-            </a:r>
-          </a:p>
-          <a:p>
-            <a:r>
-              <a:t>Entity giống hằng số hoặc #include: &amp;k; được thay bằng ma_bp; ENTITY ... SYSTEM "file" nhúng nội dung một file; entity có dấu % là entity tham số, dùng để nạp cả bộ entity trong file .ent.</a:t>
-            </a:r>
-          </a:p>
-          <a:p>
-            <a:r>
-              <a:t>Nếu file include bị thiếu thì controller lỗi khi chạy. Bcode File Lookup tô đỏ file thiếu entity; BcodeViewer báo trong bảng Problems.</a:t>
-            </a:r>
-          </a:p>
-          <a:p>
-            <a:r>
-              <a:t>Phím cần nhớ trong BcodeViewer: F12 trên &amp;Entity; để xem nội dung, Ctrl+F12 để mở file khai báo.</a:t>
+              <a:t>Đầu mỗi controller là khối DOCTYPE dùng để khai báo entity.</a:t>
+            </a:r>
+          </a:p>
+          <a:p>
+            <a:r>
+              <a:t>Entity giống hằng số hoặc lệnh #include: &amp;k; được thay bằng chữ ma_bp; ENTITY ... SYSTEM "file" nhúng nguyên nội dung một file vào; entity có dấu % là entity tham số, dùng để nạp cả một bộ entity khai trong file .ent.</a:t>
+            </a:r>
+          </a:p>
+          <a:p>
+            <a:r>
+              <a:t>Nếu file include bị thiếu thì controller sẽ lỗi khi chạy. Trong Bcode, File Lookup tô đỏ file bị thiếu entity; BcodeViewer báo lỗi này trong bảng Problems.</a:t>
+            </a:r>
+          </a:p>
+          <a:p>
+            <a:r>
+              <a:t>Phím cần nhớ trong BcodeViewer: đặt con trỏ trên &amp;Entity; rồi bấm F12 để xem nội dung, Ctrl+F12 để mở file khai báo entity đó.</a:t>
             </a:r>
           </a:p>
         </p:txBody>
@@ -955,47 +960,47 @@
           <a:lstStyle/>
           <a:p>
             <a:r>
-              <a:t>BcodeViewer là trình soạn FCode dựng trên Monaco (lõi VS Code), hiểu XML + SQL + JavaScript nhúng.</a:t>
-            </a:r>
-          </a:p>
-          <a:p>
-            <a:r>
-              <a:t>Mở file: từ Bcode Edit in BcodeViewer, hoặc Ctrl+P trong Viewer. Lưu Ctrl+S — mỗi lần lưu ghi lịch sử (máy này + lịch sử chung dự án, biết ai sửa gì).</a:t>
-            </a:r>
-          </a:p>
-          <a:p>
-            <a:r>
-              <a:t>Gợi ý: gõ f.ma_kh rồi Enter để chèn sẵn khối field có header và AutoComplete.</a:t>
-            </a:r>
-          </a:p>
-          <a:p>
-            <a:r>
-              <a:t>F12 xem entity, Ctrl+F12 mở nơi khai báo, Shift+F12 tìm nơi dùng, Ctrl+G Go to.</a:t>
-            </a:r>
-          </a:p>
-          <a:p>
-            <a:r>
-              <a:t>Ctrl+Shift+M bảng Problems — luôn sạch trước khi đóng gói.</a:t>
-            </a:r>
-          </a:p>
-          <a:p>
-            <a:r>
-              <a:t>Alt+P xem trước form Dir, bấm ô để nhảy tới code.</a:t>
-            </a:r>
-          </a:p>
-          <a:p>
-            <a:r>
-              <a:t>Ctrl+Enter chạy SQL trong command — mặc định chạy thử rồi rollback. F5 lưu rồi mở menu trên trình duyệt.</a:t>
-            </a:r>
-          </a:p>
-          <a:p>
-            <a:r>
-              <a:t>Ví dụ thêm field: thêm cột vào bảng (Gen Add Column), thêm &lt;field&gt; vào &lt;fields&gt;, thêm [field] vào dòng &lt;item value&gt; trong &lt;views&gt;, kiểm tra Problems, Alt+P, F5.</a:t>
-            </a:r>
-          </a:p>
-          <a:p>
-            <a:r>
-              <a:t>Viewer kiểm tra file mỗi 4 giây; người khác sửa file thì hiện thanh báo — xem khác biệt trước khi lưu đè.</a:t>
+              <a:t>BcodeViewer là trình soạn thảo FCode dựng trên Monaco (lõi của VS Code), hiểu cả XML, SQL và JavaScript nhúng trong file.</a:t>
+            </a:r>
+          </a:p>
+          <a:p>
+            <a:r>
+              <a:t>Mở file: từ Bcode bấm Edit in BcodeViewer, hoặc bấm Ctrl+P ngay trong Viewer. Lưu bằng Ctrl+S — mỗi lần lưu Viewer ghi lại lịch sử (lịch sử trên máy này và lịch sử chung của dự án, nhờ đó biết ai đã sửa gì).</a:t>
+            </a:r>
+          </a:p>
+          <a:p>
+            <a:r>
+              <a:t>Gợi ý code: gõ f.ma_kh rồi Enter để chèn sẵn một khối field có header và AutoComplete.</a:t>
+            </a:r>
+          </a:p>
+          <a:p>
+            <a:r>
+              <a:t>F12 xem nội dung entity, Ctrl+F12 mở nơi khai báo, Shift+F12 tìm các nơi đang dùng, Ctrl+G để Go to.</a:t>
+            </a:r>
+          </a:p>
+          <a:p>
+            <a:r>
+              <a:t>Ctrl+Shift+M mở bảng Problems — bảng này phải sạch lỗi trước khi đóng gói.</a:t>
+            </a:r>
+          </a:p>
+          <a:p>
+            <a:r>
+              <a:t>Alt+P xem trước giao diện form Dir; bấm vào một ô trên form để nhảy tới đoạn code tương ứng.</a:t>
+            </a:r>
+          </a:p>
+          <a:p>
+            <a:r>
+              <a:t>Ctrl+Enter chạy đoạn SQL trong command — mặc định chạy thử rồi rollback. F5 lưu file rồi mở menu trên trình duyệt.</a:t>
+            </a:r>
+          </a:p>
+          <a:p>
+            <a:r>
+              <a:t>Ví dụ thêm field: thêm cột vào bảng (Gen Add Column), thêm &lt;field&gt; vào &lt;fields&gt;, thêm [field] vào một dòng &lt;item value&gt; trong &lt;views&gt;, kiểm tra Problems, Alt+P, F5.</a:t>
+            </a:r>
+          </a:p>
+          <a:p>
+            <a:r>
+              <a:t>Viewer kiểm tra file mỗi 4 giây; nếu người khác vừa sửa file thì hiện thanh thông báo — hãy xem phần khác biệt trước khi lưu đè.</a:t>
             </a:r>
           </a:p>
         </p:txBody>
@@ -1065,32 +1070,32 @@
           <a:lstStyle/>
           <a:p>
             <a:r>
-              <a:t>Bốn bước thêm một field vào danh mục có sẵn.</a:t>
-            </a:r>
-          </a:p>
-          <a:p>
-            <a:r>
-              <a:t>1. Thêm cột vào bảng: tab Table → Structure → Gen Add Column, xem lại script, chạy.</a:t>
-            </a:r>
-          </a:p>
-          <a:p>
-            <a:r>
-              <a:t>2. Trong Dir: thêm &lt;field&gt; vào &lt;fields&gt;, rồi thêm [ten_field] vào một dòng &lt;item value&gt; trong &lt;views&gt;. Dòng đầu &lt;item value="120, 30, ..."&gt; là độ rộng các cột của lưới bố cục. Mặt nạ 1100010: chữ 1 mở một ô mới, các chữ 0 liền sau kéo dài ô đó, dấu - là cột trống; biến thứ n ứng với chữ 1 thứ n.</a:t>
-            </a:r>
-          </a:p>
-          <a:p>
-            <a:r>
-              <a:t>3. Muốn hiện ở danh sách: thêm field vào Grid và &lt;view id="Grid"&gt;.</a:t>
-            </a:r>
-          </a:p>
-          <a:p>
-            <a:r>
-              <a:t>4. Ctrl+Shift+M không lỗi → Alt+P xem form → F5 mở trên web thử.</a:t>
-            </a:r>
-          </a:p>
-          <a:p>
-            <a:r>
-              <a:t>Mẹo: rê chuột lên biến trong dòng item để Viewer cho biết biến chiếm vị trí nào trong mặt nạ.</a:t>
+              <a:t>Bốn bước thêm một field vào một danh mục có sẵn.</a:t>
+            </a:r>
+          </a:p>
+          <a:p>
+            <a:r>
+              <a:t>1. Thêm cột vào bảng: tab Table → Structure → Gen Add Column, đọc lại script rồi chạy.</a:t>
+            </a:r>
+          </a:p>
+          <a:p>
+            <a:r>
+              <a:t>2. Trong file Dir: thêm thẻ &lt;field&gt; vào &lt;fields&gt;, rồi thêm [ten_field] vào một dòng &lt;item value&gt; trong &lt;views&gt;. Dòng đầu tiên &lt;item value="120, 30, ..."&gt; là độ rộng các cột của lưới bố cục form. Mặt nạ 1100010: mỗi chữ 1 mở một ô mới, các chữ 0 liền sau kéo dài ô đó sang cột kế tiếp, dấu - là cột để trống; biến thứ n trong dòng ứng với chữ 1 thứ n trong mặt nạ.</a:t>
+            </a:r>
+          </a:p>
+          <a:p>
+            <a:r>
+              <a:t>3. Muốn field hiện cả ở màn hình danh sách: thêm field vào file Grid và vào &lt;view id="Grid"&gt;.</a:t>
+            </a:r>
+          </a:p>
+          <a:p>
+            <a:r>
+              <a:t>4. Bấm Ctrl+Shift+M kiểm tra không còn lỗi → Alt+P xem trước form → F5 mở trên web để thử.</a:t>
+            </a:r>
+          </a:p>
+          <a:p>
+            <a:r>
+              <a:t>Mẹo: rê chuột lên một biến trong dòng item, Viewer sẽ cho biết biến đó chiếm vị trí nào trong mặt nạ.</a:t>
             </a:r>
           </a:p>
         </p:txBody>
@@ -1165,7 +1170,7 @@
           </a:p>
           <a:p>
             <a:r>
-              <a:t>Bài tập về nhà: Chọn 1 màn hình chứng từ, ghi lại: bảng master / detail, lưới chi tiết, các command Inserting / Updating và entity include quan trọng.</a:t>
+              <a:t>Bài tập về nhà: Chọn 1 màn hình chứng từ, ghi lại: bảng master / detail, lưới chi tiết, các command Inserting / Updating và các entity include quan trọng.</a:t>
             </a:r>
           </a:p>
         </p:txBody>
@@ -1240,7 +1245,7 @@
           </a:p>
           <a:p>
             <a:r>
-              <a:t>1. File Lookup tô đỏ; BcodeViewer báo trong Problems (Ctrl+Shift+M).</a:t>
+              <a:t>1. File Lookup tô đỏ file đó; BcodeViewer báo lỗi trong Problems (Ctrl+Shift+M).</a:t>
             </a:r>
           </a:p>
           <a:p>
@@ -1255,7 +1260,7 @@
           </a:p>
           <a:p>
             <a:r>
-              <a:t>4. Không — chạy thử trong transaction rồi rollback.</a:t>
+              <a:t>4. Không. Lệnh được chạy thử trong transaction rồi rollback.</a:t>
             </a:r>
           </a:p>
         </p:txBody>
@@ -4872,7 +4877,7 @@
                 <a:ea typeface="Segoe UI"/>
                 <a:cs typeface="Segoe UI"/>
               </a:rPr>
-              <a:t>Sửa file bằng BcodeViewer, kiểm lỗi Problems, xem trước form, chạy SQL trong file</a:t>
+              <a:t>Sửa file bằng BcodeViewer, xem lỗi ở Problems, xem trước form, chạy SQL trong file</a:t>
             </a:r>
           </a:p>
           <a:p>
@@ -5116,7 +5121,7 @@
                           <a:ea typeface="Segoe UI"/>
                           <a:cs typeface="Segoe UI"/>
                         </a:rPr>
-                        <a:t>File Lookup: cây file theo menu, file đỏ, SearchBox, File Reference</a:t>
+                        <a:t>File Lookup: cây file theo menu, file tô đỏ, SearchBox, File Reference</a:t>
                       </a:r>
                     </a:p>
                   </a:txBody>
@@ -5512,7 +5517,7 @@
                 <a:ea typeface="Segoe UI"/>
                 <a:cs typeface="Segoe UI"/>
               </a:rPr>
-              <a:t> Chuẩn bị: Dự án thử có Source Path; đã khai đường dẫn BcodeViewer</a:t>
+              <a:t> Chuẩn bị: Dự án thử đã khai Source Path; đã khai đường dẫn tới BcodeViewer</a:t>
             </a:r>
           </a:p>
         </p:txBody>
@@ -6631,7 +6636,7 @@
                 <a:ea typeface="Segoe UI"/>
                 <a:cs typeface="Segoe UI"/>
               </a:rPr>
-              <a:t>Không sửa thẳng trên site khách khi chưa thử trên site / database thử.</a:t>
+              <a:t>Không sửa thẳng trên site của khách khi chưa thử trên site và database thử.</a:t>
             </a:r>
           </a:p>
           <a:p>
@@ -6704,7 +6709,7 @@
                 <a:ea typeface="Segoe UI"/>
                 <a:cs typeface="Segoe UI"/>
               </a:rPr>
-              <a:t>), lưu bản cũ (Viewer tự ghi lịch sử).</a:t>
+              <a:t>), giữ bản cũ (Viewer tự ghi lịch sử).</a:t>
             </a:r>
           </a:p>
         </p:txBody>
@@ -7072,7 +7077,7 @@
                 <a:ea typeface="Segoe UI"/>
                 <a:cs typeface="Segoe UI"/>
               </a:rPr>
-              <a:t> File Lookup thứ hai</a:t>
+              <a:t> mở File Lookup thứ hai</a:t>
             </a:r>
           </a:p>
           <a:p>
@@ -7174,7 +7179,7 @@
                 <a:ea typeface="Segoe UI"/>
                 <a:cs typeface="Segoe UI"/>
               </a:rPr>
-              <a:t> = thiếu entity</a:t>
+              <a:t> là thiếu entity</a:t>
             </a:r>
           </a:p>
           <a:p>
@@ -8098,7 +8103,7 @@
                 <a:ea typeface="Segoe UI"/>
                 <a:cs typeface="Segoe UI"/>
               </a:rPr>
-              <a:t>Thiếu include → controller lỗi</a:t>
+              <a:t>Thiếu file include → controller lỗi</a:t>
             </a:r>
           </a:p>
           <a:p>
@@ -8149,7 +8154,7 @@
                 <a:ea typeface="Segoe UI"/>
                 <a:cs typeface="Segoe UI"/>
               </a:rPr>
-              <a:t> xem · </a:t>
+              <a:t> xem nội dung · </a:t>
             </a:r>
             <a:r>
               <a:rPr sz="1700" b="1" i="0">
@@ -8488,7 +8493,7 @@
                 <a:ea typeface="Segoe UI"/>
                 <a:cs typeface="Segoe UI"/>
               </a:rPr>
-              <a:t> + Enter → khối field</a:t>
+              <a:t> + Enter → chèn khối field</a:t>
             </a:r>
           </a:p>
           <a:p>
@@ -8550,7 +8555,7 @@
                 <a:ea typeface="Segoe UI"/>
                 <a:cs typeface="Segoe UI"/>
               </a:rPr>
-              <a:t> entity</a:t>
+              <a:t> xem entity</a:t>
             </a:r>
           </a:p>
           <a:p>
@@ -8590,7 +8595,7 @@
                 <a:ea typeface="Segoe UI"/>
                 <a:cs typeface="Segoe UI"/>
               </a:rPr>
-              <a:t> </a:t>
+              <a:t> bảng </a:t>
             </a:r>
             <a:r>
               <a:rPr sz="1500" b="1" i="0">
@@ -8721,7 +8726,7 @@
                 <a:ea typeface="Segoe UI"/>
                 <a:cs typeface="Segoe UI"/>
               </a:rPr>
-              <a:t> lưu &amp; mở menu</a:t>
+              <a:t> lưu và mở menu</a:t>
             </a:r>
           </a:p>
           <a:p>
@@ -9650,7 +9655,7 @@
                 <a:ea typeface="Segoe UI"/>
                 <a:cs typeface="Segoe UI"/>
               </a:rPr>
-              <a:t> ô mới · </a:t>
+              <a:t> mở ô mới · </a:t>
             </a:r>
             <a:r>
               <a:rPr sz="1600" b="0" i="0">
@@ -9672,7 +9677,7 @@
                 <a:ea typeface="Segoe UI"/>
                 <a:cs typeface="Segoe UI"/>
               </a:rPr>
-              <a:t> kéo dài · </a:t>
+              <a:t> kéo dài ô · </a:t>
             </a:r>
             <a:r>
               <a:rPr sz="1600" b="0" i="0">
@@ -9694,7 +9699,7 @@
                 <a:ea typeface="Segoe UI"/>
                 <a:cs typeface="Segoe UI"/>
               </a:rPr>
-              <a:t> trống</a:t>
+              <a:t> cột trống</a:t>
             </a:r>
           </a:p>
         </p:txBody>
@@ -10044,7 +10049,7 @@
                 <a:ea typeface="Segoe UI"/>
                 <a:cs typeface="Segoe UI"/>
               </a:rPr>
-              <a:t> Thêm field “Số tài khoản ngân hàng” vào Danh mục bộ phận trên site thử, kiểm Problems, Alt+P, chạy F5.</a:t>
+              <a:t> Thêm field “Số tài khoản ngân hàng” vào Danh mục bộ phận trên site thử, xem Problems, xem trước bằng Alt+P, rồi chạy F5.</a:t>
             </a:r>
           </a:p>
           <a:p>
@@ -10106,7 +10111,7 @@
                 <a:ea typeface="Segoe UI"/>
                 <a:cs typeface="Segoe UI"/>
               </a:rPr>
-              <a:t>) khôi phục bản trước khi sửa.</a:t>
+              <a:t>) để khôi phục bản trước khi sửa.</a:t>
             </a:r>
           </a:p>
         </p:txBody>
@@ -10452,7 +10457,7 @@
                 <a:ea typeface="Segoe UI"/>
                 <a:cs typeface="Segoe UI"/>
               </a:rPr>
-              <a:t> Chọn 1 màn hình chứng từ, ghi lại: bảng master / detail, lưới chi tiết, các command Inserting / Updating và entity include quan trọng.</a:t>
+              <a:t> Chọn 1 màn hình chứng từ, ghi lại: bảng master / detail, lưới chi tiết, các command Inserting / Updating và các entity include quan trọng.</a:t>
             </a:r>
           </a:p>
         </p:txBody>
@@ -10904,7 +10909,7 @@
                 <a:ea typeface="Segoe UI"/>
                 <a:cs typeface="Segoe UI"/>
               </a:rPr>
-              <a:t> Viewer </a:t>
+              <a:t> </a:t>
             </a:r>
             <a:r>
               <a:rPr sz="2000" b="0" i="0">
@@ -10926,7 +10931,7 @@
                 <a:ea typeface="Segoe UI"/>
                 <a:cs typeface="Segoe UI"/>
               </a:rPr>
-              <a:t> mặc định có ghi dữ liệu không?</a:t>
+              <a:t> trong Viewer mặc định có ghi dữ liệu không?</a:t>
             </a:r>
           </a:p>
         </p:txBody>
